--- a/SQL/Intro To SQL Day 5.pptx
+++ b/SQL/Intro To SQL Day 5.pptx
@@ -216,7 +216,7 @@
           <a:p>
             <a:fld id="{B8527CFE-03D5-4546-9C4C-75BF169C7B7A}" type="datetimeFigureOut">
               <a:rPr lang="en-US" smtClean="0"/>
-              <a:t>1/16/25</a:t>
+              <a:t>7/22/26</a:t>
             </a:fld>
             <a:endParaRPr lang="en-US"/>
           </a:p>
@@ -714,7 +714,7 @@
           <a:p>
             <a:fld id="{046598D6-C04D-9446-A58F-36E01C46C344}" type="datetimeFigureOut">
               <a:rPr lang="en-US" smtClean="0"/>
-              <a:t>1/16/25</a:t>
+              <a:t>7/22/26</a:t>
             </a:fld>
             <a:endParaRPr lang="en-US"/>
           </a:p>
@@ -912,7 +912,7 @@
           <a:p>
             <a:fld id="{046598D6-C04D-9446-A58F-36E01C46C344}" type="datetimeFigureOut">
               <a:rPr lang="en-US" smtClean="0"/>
-              <a:t>1/16/25</a:t>
+              <a:t>7/22/26</a:t>
             </a:fld>
             <a:endParaRPr lang="en-US"/>
           </a:p>
@@ -1120,7 +1120,7 @@
           <a:p>
             <a:fld id="{046598D6-C04D-9446-A58F-36E01C46C344}" type="datetimeFigureOut">
               <a:rPr lang="en-US" smtClean="0"/>
-              <a:t>1/16/25</a:t>
+              <a:t>7/22/26</a:t>
             </a:fld>
             <a:endParaRPr lang="en-US"/>
           </a:p>
@@ -1318,7 +1318,7 @@
           <a:p>
             <a:fld id="{046598D6-C04D-9446-A58F-36E01C46C344}" type="datetimeFigureOut">
               <a:rPr lang="en-US" smtClean="0"/>
-              <a:t>1/16/25</a:t>
+              <a:t>7/22/26</a:t>
             </a:fld>
             <a:endParaRPr lang="en-US"/>
           </a:p>
@@ -1593,7 +1593,7 @@
           <a:p>
             <a:fld id="{046598D6-C04D-9446-A58F-36E01C46C344}" type="datetimeFigureOut">
               <a:rPr lang="en-US" smtClean="0"/>
-              <a:t>1/16/25</a:t>
+              <a:t>7/22/26</a:t>
             </a:fld>
             <a:endParaRPr lang="en-US"/>
           </a:p>
@@ -1858,7 +1858,7 @@
           <a:p>
             <a:fld id="{046598D6-C04D-9446-A58F-36E01C46C344}" type="datetimeFigureOut">
               <a:rPr lang="en-US" smtClean="0"/>
-              <a:t>1/16/25</a:t>
+              <a:t>7/22/26</a:t>
             </a:fld>
             <a:endParaRPr lang="en-US"/>
           </a:p>
@@ -2270,7 +2270,7 @@
           <a:p>
             <a:fld id="{046598D6-C04D-9446-A58F-36E01C46C344}" type="datetimeFigureOut">
               <a:rPr lang="en-US" smtClean="0"/>
-              <a:t>1/16/25</a:t>
+              <a:t>7/22/26</a:t>
             </a:fld>
             <a:endParaRPr lang="en-US"/>
           </a:p>
@@ -2411,7 +2411,7 @@
           <a:p>
             <a:fld id="{046598D6-C04D-9446-A58F-36E01C46C344}" type="datetimeFigureOut">
               <a:rPr lang="en-US" smtClean="0"/>
-              <a:t>1/16/25</a:t>
+              <a:t>7/22/26</a:t>
             </a:fld>
             <a:endParaRPr lang="en-US"/>
           </a:p>
@@ -2524,7 +2524,7 @@
           <a:p>
             <a:fld id="{046598D6-C04D-9446-A58F-36E01C46C344}" type="datetimeFigureOut">
               <a:rPr lang="en-US" smtClean="0"/>
-              <a:t>1/16/25</a:t>
+              <a:t>7/22/26</a:t>
             </a:fld>
             <a:endParaRPr lang="en-US"/>
           </a:p>
@@ -2835,7 +2835,7 @@
           <a:p>
             <a:fld id="{046598D6-C04D-9446-A58F-36E01C46C344}" type="datetimeFigureOut">
               <a:rPr lang="en-US" smtClean="0"/>
-              <a:t>1/16/25</a:t>
+              <a:t>7/22/26</a:t>
             </a:fld>
             <a:endParaRPr lang="en-US"/>
           </a:p>
@@ -3123,7 +3123,7 @@
           <a:p>
             <a:fld id="{046598D6-C04D-9446-A58F-36E01C46C344}" type="datetimeFigureOut">
               <a:rPr lang="en-US" smtClean="0"/>
-              <a:t>1/16/25</a:t>
+              <a:t>7/22/26</a:t>
             </a:fld>
             <a:endParaRPr lang="en-US"/>
           </a:p>
@@ -3364,7 +3364,7 @@
           <a:p>
             <a:fld id="{046598D6-C04D-9446-A58F-36E01C46C344}" type="datetimeFigureOut">
               <a:rPr lang="en-US" smtClean="0"/>
-              <a:t>1/16/25</a:t>
+              <a:t>7/22/26</a:t>
             </a:fld>
             <a:endParaRPr lang="en-US"/>
           </a:p>
@@ -3851,9 +3851,10 @@
           </a:p>
           <a:p>
             <a:r>
-              <a:rPr lang="en-US" dirty="0"/>
-              <a:t>January 16, 2025</a:t>
-            </a:r>
+              <a:rPr lang="en-US"/>
+              <a:t>July 29, 2026</a:t>
+            </a:r>
+            <a:endParaRPr lang="en-US" dirty="0"/>
           </a:p>
         </p:txBody>
       </p:sp>

--- a/SQL/Intro To SQL Day 5.pptx
+++ b/SQL/Intro To SQL Day 5.pptx
@@ -216,7 +216,7 @@
           <a:p>
             <a:fld id="{B8527CFE-03D5-4546-9C4C-75BF169C7B7A}" type="datetimeFigureOut">
               <a:rPr lang="en-US" smtClean="0"/>
-              <a:t>7/22/26</a:t>
+              <a:t>9/1/26</a:t>
             </a:fld>
             <a:endParaRPr lang="en-US"/>
           </a:p>
@@ -714,7 +714,7 @@
           <a:p>
             <a:fld id="{046598D6-C04D-9446-A58F-36E01C46C344}" type="datetimeFigureOut">
               <a:rPr lang="en-US" smtClean="0"/>
-              <a:t>7/22/26</a:t>
+              <a:t>9/1/26</a:t>
             </a:fld>
             <a:endParaRPr lang="en-US"/>
           </a:p>
@@ -912,7 +912,7 @@
           <a:p>
             <a:fld id="{046598D6-C04D-9446-A58F-36E01C46C344}" type="datetimeFigureOut">
               <a:rPr lang="en-US" smtClean="0"/>
-              <a:t>7/22/26</a:t>
+              <a:t>9/1/26</a:t>
             </a:fld>
             <a:endParaRPr lang="en-US"/>
           </a:p>
@@ -1120,7 +1120,7 @@
           <a:p>
             <a:fld id="{046598D6-C04D-9446-A58F-36E01C46C344}" type="datetimeFigureOut">
               <a:rPr lang="en-US" smtClean="0"/>
-              <a:t>7/22/26</a:t>
+              <a:t>9/1/26</a:t>
             </a:fld>
             <a:endParaRPr lang="en-US"/>
           </a:p>
@@ -1318,7 +1318,7 @@
           <a:p>
             <a:fld id="{046598D6-C04D-9446-A58F-36E01C46C344}" type="datetimeFigureOut">
               <a:rPr lang="en-US" smtClean="0"/>
-              <a:t>7/22/26</a:t>
+              <a:t>9/1/26</a:t>
             </a:fld>
             <a:endParaRPr lang="en-US"/>
           </a:p>
@@ -1593,7 +1593,7 @@
           <a:p>
             <a:fld id="{046598D6-C04D-9446-A58F-36E01C46C344}" type="datetimeFigureOut">
               <a:rPr lang="en-US" smtClean="0"/>
-              <a:t>7/22/26</a:t>
+              <a:t>9/1/26</a:t>
             </a:fld>
             <a:endParaRPr lang="en-US"/>
           </a:p>
@@ -1858,7 +1858,7 @@
           <a:p>
             <a:fld id="{046598D6-C04D-9446-A58F-36E01C46C344}" type="datetimeFigureOut">
               <a:rPr lang="en-US" smtClean="0"/>
-              <a:t>7/22/26</a:t>
+              <a:t>9/1/26</a:t>
             </a:fld>
             <a:endParaRPr lang="en-US"/>
           </a:p>
@@ -2270,7 +2270,7 @@
           <a:p>
             <a:fld id="{046598D6-C04D-9446-A58F-36E01C46C344}" type="datetimeFigureOut">
               <a:rPr lang="en-US" smtClean="0"/>
-              <a:t>7/22/26</a:t>
+              <a:t>9/1/26</a:t>
             </a:fld>
             <a:endParaRPr lang="en-US"/>
           </a:p>
@@ -2411,7 +2411,7 @@
           <a:p>
             <a:fld id="{046598D6-C04D-9446-A58F-36E01C46C344}" type="datetimeFigureOut">
               <a:rPr lang="en-US" smtClean="0"/>
-              <a:t>7/22/26</a:t>
+              <a:t>9/1/26</a:t>
             </a:fld>
             <a:endParaRPr lang="en-US"/>
           </a:p>
@@ -2524,7 +2524,7 @@
           <a:p>
             <a:fld id="{046598D6-C04D-9446-A58F-36E01C46C344}" type="datetimeFigureOut">
               <a:rPr lang="en-US" smtClean="0"/>
-              <a:t>7/22/26</a:t>
+              <a:t>9/1/26</a:t>
             </a:fld>
             <a:endParaRPr lang="en-US"/>
           </a:p>
@@ -2835,7 +2835,7 @@
           <a:p>
             <a:fld id="{046598D6-C04D-9446-A58F-36E01C46C344}" type="datetimeFigureOut">
               <a:rPr lang="en-US" smtClean="0"/>
-              <a:t>7/22/26</a:t>
+              <a:t>9/1/26</a:t>
             </a:fld>
             <a:endParaRPr lang="en-US"/>
           </a:p>
@@ -3123,7 +3123,7 @@
           <a:p>
             <a:fld id="{046598D6-C04D-9446-A58F-36E01C46C344}" type="datetimeFigureOut">
               <a:rPr lang="en-US" smtClean="0"/>
-              <a:t>7/22/26</a:t>
+              <a:t>9/1/26</a:t>
             </a:fld>
             <a:endParaRPr lang="en-US"/>
           </a:p>
@@ -3364,7 +3364,7 @@
           <a:p>
             <a:fld id="{046598D6-C04D-9446-A58F-36E01C46C344}" type="datetimeFigureOut">
               <a:rPr lang="en-US" smtClean="0"/>
-              <a:t>7/22/26</a:t>
+              <a:t>9/1/26</a:t>
             </a:fld>
             <a:endParaRPr lang="en-US"/>
           </a:p>
@@ -3851,10 +3851,9 @@
           </a:p>
           <a:p>
             <a:r>
-              <a:rPr lang="en-US"/>
-              <a:t>July 29, 2026</a:t>
-            </a:r>
-            <a:endParaRPr lang="en-US" dirty="0"/>
+              <a:rPr lang="en-US" dirty="0"/>
+              <a:t>September 1, 2026</a:t>
+            </a:r>
           </a:p>
         </p:txBody>
       </p:sp>
@@ -4451,7 +4450,7 @@
             </a:r>
             <a:r>
               <a:rPr lang="en-US" sz="2400" dirty="0" err="1"/>
-              <a:t>lastName</a:t>
+              <a:t>last_Name</a:t>
             </a:r>
             <a:r>
               <a:rPr lang="en-US" sz="2400" dirty="0"/>
@@ -4459,27 +4458,15 @@
             </a:r>
             <a:r>
               <a:rPr lang="en-US" sz="2400" dirty="0" err="1"/>
-              <a:t>firstName</a:t>
+              <a:t>first_Name</a:t>
             </a:r>
             <a:r>
               <a:rPr lang="en-US" sz="2400" dirty="0"/>
-              <a:t>, </a:t>
-            </a:r>
-            <a:r>
-              <a:rPr lang="en-US" sz="2400" dirty="0">
-                <a:solidFill>
-                  <a:srgbClr val="0070C0"/>
-                </a:solidFill>
-              </a:rPr>
-              <a:t>CONCAT</a:t>
-            </a:r>
-            <a:r>
-              <a:rPr lang="en-US" sz="2400" dirty="0"/>
-              <a:t> (</a:t>
+              <a:t>, CONCAT (</a:t>
             </a:r>
             <a:r>
               <a:rPr lang="en-US" sz="2400" dirty="0" err="1"/>
-              <a:t>lastName</a:t>
+              <a:t>last_Name</a:t>
             </a:r>
             <a:r>
               <a:rPr lang="en-US" sz="2400" dirty="0"/>
@@ -4487,7 +4474,7 @@
             </a:r>
             <a:r>
               <a:rPr lang="en-US" sz="2400" dirty="0" err="1"/>
-              <a:t>firstName</a:t>
+              <a:t>first_Name</a:t>
             </a:r>
             <a:r>
               <a:rPr lang="en-US" sz="2400" dirty="0"/>
@@ -4495,12 +4482,9 @@
             </a:r>
             <a:r>
               <a:rPr lang="en-US" sz="2400" dirty="0" err="1"/>
-              <a:t>fullName</a:t>
-            </a:r>
-            <a:r>
-              <a:rPr lang="en-US" sz="2400" dirty="0"/>
-              <a:t> </a:t>
-            </a:r>
+              <a:t>full_Name</a:t>
+            </a:r>
+            <a:endParaRPr lang="en-US" sz="2400" dirty="0"/>
           </a:p>
           <a:p>
             <a:pPr marL="0" indent="0">
